--- a/decks/hist-somme/hist-somme_ch2_july-crisis.pptx
+++ b/decks/hist-somme/hist-somme_ch2_july-crisis.pptx
@@ -127,30 +127,30 @@
   <p:extLst>
     <p:ext uri="{521415D9-36F7-43E2-AB2F-B90AF26B5E84}">
       <p14:sectionLst xmlns:p14="http://schemas.microsoft.com/office/powerpoint/2010/main">
-        <p14:section name="Opening" id="{aa1164c2-2d93-c322-daae-737f9830d989}">
+        <p14:section name="Opening" id="{cfcfbef0-91e2-e416-857c-3c8b4506a5f2}">
           <p14:sldIdLst>
             <p14:sldId id="256"/>
           </p14:sldIdLst>
         </p14:section>
-        <p14:section name="Gate" id="{bcc2836a-7166-8d95-5e32-05b28101b226}">
+        <p14:section name="Gate" id="{877b1581-4a89-5e91-be76-0db634c18760}">
           <p14:sldIdLst>
             <p14:sldId id="257"/>
             <p14:sldId id="258"/>
           </p14:sldIdLst>
         </p14:section>
-        <p14:section name="Pre-teach" id="{04574fea-6fc6-0466-4ea5-2be1aafe732c}">
+        <p14:section name="Pre-teach" id="{b4656d2e-5dc9-3034-0827-877a36f5a801}">
           <p14:sldIdLst>
             <p14:sldId id="259"/>
             <p14:sldId id="260"/>
           </p14:sldIdLst>
         </p14:section>
-        <p14:section name="Read-along" id="{304db04e-2379-8215-7a39-ce832aef0cc8}">
+        <p14:section name="Read-along" id="{acc91701-683c-9812-6f44-ffec146c15b8}">
           <p14:sldIdLst>
             <p14:sldId id="261"/>
             <p14:sldId id="262"/>
           </p14:sldIdLst>
         </p14:section>
-        <p14:section name="Teach" id="{d46f0742-a317-3c3f-79a3-b6b475c32781}">
+        <p14:section name="Teach" id="{2bc3649e-f872-8a01-dd67-f549ed98c266}">
           <p14:sldIdLst>
             <p14:sldId id="263"/>
             <p14:sldId id="264"/>
@@ -159,7 +159,7 @@
             <p14:sldId id="267"/>
           </p14:sldIdLst>
         </p14:section>
-        <p14:section name="Routes" id="{37eeaf50-3a39-6c50-b38a-d0c60e8d9fa5}">
+        <p14:section name="Routes" id="{ec8666f3-bc02-7ada-81c4-645941b0d07b}">
           <p14:sldIdLst>
             <p14:sldId id="268"/>
             <p14:sldId id="269"/>
@@ -167,12 +167,12 @@
             <p14:sldId id="271"/>
           </p14:sldIdLst>
         </p14:section>
-        <p14:section name="Close" id="{9fdc9bd8-f345-341b-2eae-2cc63119491c}">
+        <p14:section name="Close" id="{ec938fc1-5ecd-3e38-4fbc-cd790a57f79c}">
           <p14:sldIdLst>
             <p14:sldId id="272"/>
           </p14:sldIdLst>
         </p14:section>
-        <p14:section name="Answers" id="{0d2de537-00ab-9b96-5767-d4f4aee2a098}">
+        <p14:section name="Answers" id="{855f94eb-3e0c-a0da-41b8-5741e930215d}">
           <p14:sldIdLst>
             <p14:sldId id="273"/>
             <p14:sldId id="274"/>
